--- a/config/pptx-styles/free-form/base-template.pptx
+++ b/config/pptx-styles/free-form/base-template.pptx
@@ -1259,7 +1259,7 @@
                 <a:solidFill>
                   <a:srgbClr val="1F1E1E"/>
                 </a:solidFill>
-                <a:latin typeface="Roboto Mono Medium" pitchFamily="34" charset="0"/>
+                <a:latin typeface="Helvetica Bold" pitchFamily="34" charset="0"/>
                 <a:ea typeface="Roboto Mono Medium" pitchFamily="34" charset="-122"/>
                 <a:cs typeface="Roboto Mono Medium" pitchFamily="34" charset="-120"/>
               </a:rPr>
@@ -1301,7 +1301,7 @@
                 <a:solidFill>
                   <a:srgbClr val="1F1E1E"/>
                 </a:solidFill>
-                <a:latin typeface="Roboto Mono Medium" pitchFamily="34" charset="0"/>
+                <a:latin typeface="Helvetica Bold" pitchFamily="34" charset="0"/>
                 <a:ea typeface="Roboto Mono Medium" pitchFamily="34" charset="-122"/>
                 <a:cs typeface="Roboto Mono Medium" pitchFamily="34" charset="-120"/>
               </a:rPr>
@@ -1346,7 +1346,7 @@
                 <a:solidFill>
                   <a:srgbClr val="3B3535"/>
                 </a:solidFill>
-                <a:latin typeface="Roboto" pitchFamily="34" charset="0"/>
+                <a:latin typeface="Helvetica" pitchFamily="34" charset="0"/>
                 <a:ea typeface="Roboto" pitchFamily="34" charset="-122"/>
                 <a:cs typeface="Roboto" pitchFamily="34" charset="-120"/>
               </a:rPr>
@@ -1366,7 +1366,7 @@
                 <a:solidFill>
                   <a:srgbClr val="3B3535"/>
                 </a:solidFill>
-                <a:latin typeface="Roboto" pitchFamily="34" charset="0"/>
+                <a:latin typeface="Helvetica" pitchFamily="34" charset="0"/>
                 <a:ea typeface="Roboto" pitchFamily="34" charset="-122"/>
                 <a:cs typeface="Roboto" pitchFamily="34" charset="-120"/>
               </a:rPr>
